--- a/dist/초6/영어/말하기와쓰기/초6_영어_말하기와쓰기_03_의견말하기.pptx
+++ b/dist/초6/영어/말하기와쓰기/초6_영어_말하기와쓰기_03_의견말하기.pptx
@@ -120,20 +120,20 @@
   <p:extLst>
     <p:ext uri="{521415D9-36F7-43E2-AB2F-B90AF26B5E84}">
       <p14:sectionLst xmlns:p14="http://schemas.microsoft.com/office/powerpoint/2010/main">
-        <p14:section name="도입" id="{d7349fe5-2dc1-4777-208e-4526db56037c}">
+        <p14:section name="도입" id="{aed25f8e-3f01-e3d1-f04f-6e7181bf7073}">
           <p14:sldIdLst>
             <p14:sldId id="256"/>
             <p14:sldId id="257"/>
           </p14:sldIdLst>
         </p14:section>
-        <p14:section name="개념" id="{e5502820-10d6-f904-a314-6073b2a7af6a}">
+        <p14:section name="개념" id="{ef219ce0-b314-dcf6-3b7c-e1c75082d8ce}">
           <p14:sldIdLst>
             <p14:sldId id="258"/>
             <p14:sldId id="259"/>
             <p14:sldId id="260"/>
           </p14:sldIdLst>
         </p14:section>
-        <p14:section name="연습" id="{c7aa622d-d693-a5be-d0ed-a2566a292d5c}">
+        <p14:section name="연습" id="{ef13b8b4-9deb-c923-281c-43cc1345418c}">
           <p14:sldIdLst>
             <p14:sldId id="261"/>
             <p14:sldId id="262"/>
@@ -141,19 +141,19 @@
             <p14:sldId id="264"/>
           </p14:sldIdLst>
         </p14:section>
-        <p14:section name="확인" id="{08f271b8-765a-a829-a2c3-15f17f8637dc}">
+        <p14:section name="확인" id="{71a8a375-2c56-1ea3-7e02-65f5dc00fe8e}">
           <p14:sldIdLst>
             <p14:sldId id="265"/>
             <p14:sldId id="266"/>
             <p14:sldId id="267"/>
           </p14:sldIdLst>
         </p14:section>
-        <p14:section name="정리" id="{e5d65ccd-fa16-93c4-8dc5-882119418888}">
+        <p14:section name="정리" id="{34453829-96c8-c925-3b1c-eff38025fe61}">
           <p14:sldIdLst>
             <p14:sldId id="268"/>
           </p14:sldIdLst>
         </p14:section>
-        <p14:section name="보충" id="{5c69876b-3aad-5e85-c173-15a6e2ff7e28}">
+        <p14:section name="보충" id="{2156c502-a12b-e046-de83-37935fa0aa90}">
           <p14:sldIdLst>
             <p14:sldId id="269"/>
           </p14:sldIdLst>
@@ -3313,7 +3313,7 @@
       </p:sp>
       <p:sp>
         <p:nvSpPr>
-          <p:cNvPr id="3" name="S10-text64"/>
+          <p:cNvPr id="3" name="S10-text67"/>
           <p:cNvSpPr txBox="1"/>
           <p:nvPr/>
         </p:nvSpPr>
@@ -3352,7 +3352,7 @@
       </p:sp>
       <p:sp>
         <p:nvSpPr>
-          <p:cNvPr id="4" name="S10-chip65"/>
+          <p:cNvPr id="4" name="S10-chip68"/>
           <p:cNvSpPr txBox="1"/>
           <p:nvPr/>
         </p:nvSpPr>
@@ -3399,7 +3399,7 @@
       </p:sp>
       <p:sp>
         <p:nvSpPr>
-          <p:cNvPr id="5" name="S10-text66"/>
+          <p:cNvPr id="5" name="S10-text69"/>
           <p:cNvSpPr txBox="1"/>
           <p:nvPr/>
         </p:nvSpPr>
@@ -3455,7 +3455,7 @@
       </p:sp>
       <p:sp>
         <p:nvSpPr>
-          <p:cNvPr id="6" name="S10-chip67"/>
+          <p:cNvPr id="6" name="S10-chip70"/>
           <p:cNvSpPr txBox="1"/>
           <p:nvPr/>
         </p:nvSpPr>
@@ -3502,7 +3502,7 @@
       </p:sp>
       <p:sp>
         <p:nvSpPr>
-          <p:cNvPr id="7" name="S10-text68"/>
+          <p:cNvPr id="7" name="S10-text71"/>
           <p:cNvSpPr txBox="1"/>
           <p:nvPr/>
         </p:nvSpPr>
@@ -3558,7 +3558,7 @@
       </p:sp>
       <p:sp>
         <p:nvSpPr>
-          <p:cNvPr id="8" name="S10-chip69"/>
+          <p:cNvPr id="8" name="S10-chip72"/>
           <p:cNvSpPr txBox="1"/>
           <p:nvPr/>
         </p:nvSpPr>
@@ -3605,7 +3605,7 @@
       </p:sp>
       <p:sp>
         <p:nvSpPr>
-          <p:cNvPr id="9" name="S10-text70"/>
+          <p:cNvPr id="9" name="S10-text73"/>
           <p:cNvSpPr txBox="1"/>
           <p:nvPr/>
         </p:nvSpPr>
@@ -3661,7 +3661,7 @@
       </p:sp>
       <p:sp>
         <p:nvSpPr>
-          <p:cNvPr id="10" name="S10-chip71"/>
+          <p:cNvPr id="10" name="S10-chip74"/>
           <p:cNvSpPr txBox="1"/>
           <p:nvPr/>
         </p:nvSpPr>
@@ -3708,7 +3708,7 @@
       </p:sp>
       <p:sp>
         <p:nvSpPr>
-          <p:cNvPr id="11" name="S10-text72"/>
+          <p:cNvPr id="11" name="S10-text75"/>
           <p:cNvSpPr txBox="1"/>
           <p:nvPr/>
         </p:nvSpPr>
@@ -3861,7 +3861,7 @@
       </p:sp>
       <p:sp>
         <p:nvSpPr>
-          <p:cNvPr id="3" name="S11-chip73"/>
+          <p:cNvPr id="3" name="S11-chip76"/>
           <p:cNvSpPr txBox="1"/>
           <p:nvPr/>
         </p:nvSpPr>
@@ -3908,7 +3908,7 @@
       </p:sp>
       <p:sp>
         <p:nvSpPr>
-          <p:cNvPr id="4" name="S11-text74"/>
+          <p:cNvPr id="4" name="S11-text77"/>
           <p:cNvSpPr txBox="1"/>
           <p:nvPr/>
         </p:nvSpPr>
@@ -3964,7 +3964,7 @@
       </p:sp>
       <p:sp>
         <p:nvSpPr>
-          <p:cNvPr id="5" name="S11-text75"/>
+          <p:cNvPr id="5" name="S11-text78"/>
           <p:cNvSpPr txBox="1"/>
           <p:nvPr/>
         </p:nvSpPr>
@@ -3987,7 +3987,7 @@
               <a:buNone/>
             </a:pPr>
             <a:r>
-              <a:rPr lang="en-US" altLang="ko-KR" sz="2200" dirty="0">
+              <a:rPr lang="en-US" altLang="ko-KR" sz="2800" dirty="0">
                 <a:solidFill>
                   <a:srgbClr val="1F2937"/>
                 </a:solidFill>
@@ -3995,16 +3995,16 @@
                 <a:ea typeface="맑은 고딕" pitchFamily="34" charset="-122"/>
                 <a:cs typeface="맑은 고딕" pitchFamily="34" charset="-120"/>
               </a:rPr>
-              <a:t>② I think the library is great</a:t>
-            </a:r>
-            <a:endParaRPr lang="ko-KR" sz="2200" dirty="0"/>
+              <a:t>② I think the library</a:t>
+            </a:r>
+            <a:endParaRPr lang="ko-KR" sz="2800" dirty="0"/>
           </a:p>
           <a:p>
             <a:pPr eaLnBrk="0" algn="l" indent="0" marL="0">
               <a:buNone/>
             </a:pPr>
             <a:r>
-              <a:rPr lang="en-US" altLang="ko-KR" sz="2200" dirty="0">
+              <a:rPr lang="en-US" altLang="ko-KR" sz="2800" dirty="0">
                 <a:solidFill>
                   <a:srgbClr val="1F2937"/>
                 </a:solidFill>
@@ -4012,15 +4012,15 @@
                 <a:ea typeface="맑은 고딕" pitchFamily="34" charset="-122"/>
                 <a:cs typeface="맑은 고딕" pitchFamily="34" charset="-120"/>
               </a:rPr>
-              <a:t>because I can read many books.</a:t>
-            </a:r>
-            <a:endParaRPr lang="ko-KR" sz="2200" dirty="0"/>
-          </a:p>
-        </p:txBody>
-      </p:sp>
-      <p:sp>
-        <p:nvSpPr>
-          <p:cNvPr id="6" name="S11-text76"/>
+              <a:t>is great because …</a:t>
+            </a:r>
+            <a:endParaRPr lang="ko-KR" sz="2800" dirty="0"/>
+          </a:p>
+        </p:txBody>
+      </p:sp>
+      <p:sp>
+        <p:nvSpPr>
+          <p:cNvPr id="6" name="S11-text79"/>
           <p:cNvSpPr txBox="1"/>
           <p:nvPr/>
         </p:nvSpPr>
@@ -4076,7 +4076,7 @@
       </p:sp>
       <p:sp>
         <p:nvSpPr>
-          <p:cNvPr id="7" name="S11-text77"/>
+          <p:cNvPr id="7" name="S11-text80"/>
           <p:cNvSpPr txBox="1"/>
           <p:nvPr/>
         </p:nvSpPr>
@@ -4132,7 +4132,7 @@
       </p:sp>
       <p:sp>
         <p:nvSpPr>
-          <p:cNvPr id="8" name="S11-chip78"/>
+          <p:cNvPr id="8" name="S11-chip81"/>
           <p:cNvSpPr txBox="1"/>
           <p:nvPr/>
         </p:nvSpPr>
@@ -4179,7 +4179,7 @@
       </p:sp>
       <p:sp>
         <p:nvSpPr>
-          <p:cNvPr id="9" name="S11-text79"/>
+          <p:cNvPr id="9" name="S11-text82"/>
           <p:cNvSpPr txBox="1"/>
           <p:nvPr/>
         </p:nvSpPr>
@@ -4218,7 +4218,7 @@
       </p:sp>
       <p:sp>
         <p:nvSpPr>
-          <p:cNvPr id="10" name="S11-text80"/>
+          <p:cNvPr id="10" name="S11-text83"/>
           <p:cNvSpPr txBox="1"/>
           <p:nvPr/>
         </p:nvSpPr>
@@ -4257,7 +4257,7 @@
       </p:sp>
       <p:sp>
         <p:nvSpPr>
-          <p:cNvPr id="11" name="S11-text81"/>
+          <p:cNvPr id="11" name="S11-text84"/>
           <p:cNvSpPr txBox="1"/>
           <p:nvPr/>
         </p:nvSpPr>
@@ -4296,7 +4296,7 @@
       </p:sp>
       <p:sp>
         <p:nvSpPr>
-          <p:cNvPr id="12" name="S11-text82"/>
+          <p:cNvPr id="12" name="S11-text85"/>
           <p:cNvSpPr txBox="1"/>
           <p:nvPr/>
         </p:nvSpPr>
@@ -4335,7 +4335,7 @@
       </p:sp>
       <p:sp>
         <p:nvSpPr>
-          <p:cNvPr id="13" name="S11-text83"/>
+          <p:cNvPr id="13" name="S11-text86"/>
           <p:cNvSpPr txBox="1"/>
           <p:nvPr/>
         </p:nvSpPr>
@@ -4391,7 +4391,7 @@
       </p:sp>
       <p:sp>
         <p:nvSpPr>
-          <p:cNvPr id="14" name="S11-text84"/>
+          <p:cNvPr id="14" name="S11-text87"/>
           <p:cNvSpPr txBox="1"/>
           <p:nvPr/>
         </p:nvSpPr>
@@ -4544,7 +4544,7 @@
       </p:sp>
       <p:sp>
         <p:nvSpPr>
-          <p:cNvPr id="3" name="S12-card85"/>
+          <p:cNvPr id="3" name="S12-card88"/>
           <p:cNvSpPr/>
           <p:nvPr/>
         </p:nvSpPr>
@@ -4571,7 +4571,7 @@
       </p:sp>
       <p:sp>
         <p:nvSpPr>
-          <p:cNvPr id="4" name="S12-cardtext86"/>
+          <p:cNvPr id="4" name="S12-cardtext89"/>
           <p:cNvSpPr txBox="1"/>
           <p:nvPr/>
         </p:nvSpPr>
@@ -4613,7 +4613,7 @@
       </p:sp>
       <p:sp>
         <p:nvSpPr>
-          <p:cNvPr id="5" name="S12-chip87"/>
+          <p:cNvPr id="5" name="S12-chip90"/>
           <p:cNvSpPr txBox="1"/>
           <p:nvPr/>
         </p:nvSpPr>
@@ -4660,7 +4660,7 @@
       </p:sp>
       <p:sp>
         <p:nvSpPr>
-          <p:cNvPr id="6" name="S12-card88"/>
+          <p:cNvPr id="6" name="S12-card91"/>
           <p:cNvSpPr/>
           <p:nvPr/>
         </p:nvSpPr>
@@ -4687,7 +4687,7 @@
       </p:sp>
       <p:sp>
         <p:nvSpPr>
-          <p:cNvPr id="7" name="S12-cardtext89"/>
+          <p:cNvPr id="7" name="S12-cardtext92"/>
           <p:cNvSpPr txBox="1"/>
           <p:nvPr/>
         </p:nvSpPr>
@@ -4729,7 +4729,7 @@
       </p:sp>
       <p:sp>
         <p:nvSpPr>
-          <p:cNvPr id="8" name="S12-chip90"/>
+          <p:cNvPr id="8" name="S12-chip93"/>
           <p:cNvSpPr txBox="1"/>
           <p:nvPr/>
         </p:nvSpPr>
@@ -4776,7 +4776,7 @@
       </p:sp>
       <p:sp>
         <p:nvSpPr>
-          <p:cNvPr id="9" name="S12-card91"/>
+          <p:cNvPr id="9" name="S12-card94"/>
           <p:cNvSpPr/>
           <p:nvPr/>
         </p:nvSpPr>
@@ -4803,7 +4803,7 @@
       </p:sp>
       <p:sp>
         <p:nvSpPr>
-          <p:cNvPr id="10" name="S12-cardtext92"/>
+          <p:cNvPr id="10" name="S12-cardtext95"/>
           <p:cNvSpPr txBox="1"/>
           <p:nvPr/>
         </p:nvSpPr>
@@ -4845,7 +4845,7 @@
       </p:sp>
       <p:sp>
         <p:nvSpPr>
-          <p:cNvPr id="11" name="S12-chip93"/>
+          <p:cNvPr id="11" name="S12-chip96"/>
           <p:cNvSpPr txBox="1"/>
           <p:nvPr/>
         </p:nvSpPr>
@@ -4892,7 +4892,7 @@
       </p:sp>
       <p:sp>
         <p:nvSpPr>
-          <p:cNvPr id="12" name="S12-card94"/>
+          <p:cNvPr id="12" name="S12-card97"/>
           <p:cNvSpPr/>
           <p:nvPr/>
         </p:nvSpPr>
@@ -4919,7 +4919,7 @@
       </p:sp>
       <p:sp>
         <p:nvSpPr>
-          <p:cNvPr id="13" name="S12-cardtext95"/>
+          <p:cNvPr id="13" name="S12-cardtext98"/>
           <p:cNvSpPr txBox="1"/>
           <p:nvPr/>
         </p:nvSpPr>
@@ -4961,7 +4961,7 @@
       </p:sp>
       <p:sp>
         <p:nvSpPr>
-          <p:cNvPr id="14" name="S12-chip96"/>
+          <p:cNvPr id="14" name="S12-chip99"/>
           <p:cNvSpPr txBox="1"/>
           <p:nvPr/>
         </p:nvSpPr>
@@ -5008,7 +5008,7 @@
       </p:sp>
       <p:sp>
         <p:nvSpPr>
-          <p:cNvPr id="15" name="S12-card97"/>
+          <p:cNvPr id="15" name="S12-card100"/>
           <p:cNvSpPr/>
           <p:nvPr/>
         </p:nvSpPr>
@@ -5035,7 +5035,7 @@
       </p:sp>
       <p:sp>
         <p:nvSpPr>
-          <p:cNvPr id="16" name="S12-cardtext98"/>
+          <p:cNvPr id="16" name="S12-cardtext101"/>
           <p:cNvSpPr txBox="1"/>
           <p:nvPr/>
         </p:nvSpPr>
@@ -5191,7 +5191,7 @@
       </p:sp>
       <p:sp>
         <p:nvSpPr>
-          <p:cNvPr id="3" name="S13-card99"/>
+          <p:cNvPr id="3" name="S13-card102"/>
           <p:cNvSpPr/>
           <p:nvPr/>
         </p:nvSpPr>
@@ -5218,7 +5218,7 @@
       </p:sp>
       <p:sp>
         <p:nvSpPr>
-          <p:cNvPr id="4" name="S13-cardtext100"/>
+          <p:cNvPr id="4" name="S13-cardtext103"/>
           <p:cNvSpPr txBox="1"/>
           <p:nvPr/>
         </p:nvSpPr>
@@ -5280,7 +5280,7 @@
       </p:sp>
       <p:sp>
         <p:nvSpPr>
-          <p:cNvPr id="5" name="S13-chip101"/>
+          <p:cNvPr id="5" name="S13-chip104"/>
           <p:cNvSpPr txBox="1"/>
           <p:nvPr/>
         </p:nvSpPr>
@@ -5327,7 +5327,7 @@
       </p:sp>
       <p:sp>
         <p:nvSpPr>
-          <p:cNvPr id="6" name="S13-chip102"/>
+          <p:cNvPr id="6" name="S13-chip105"/>
           <p:cNvSpPr txBox="1"/>
           <p:nvPr/>
         </p:nvSpPr>
@@ -5374,7 +5374,7 @@
       </p:sp>
       <p:sp>
         <p:nvSpPr>
-          <p:cNvPr id="7" name="S13-text103"/>
+          <p:cNvPr id="7" name="S13-text106"/>
           <p:cNvSpPr txBox="1"/>
           <p:nvPr/>
         </p:nvSpPr>
@@ -5413,7 +5413,7 @@
       </p:sp>
       <p:sp>
         <p:nvSpPr>
-          <p:cNvPr id="8" name="S13-text104"/>
+          <p:cNvPr id="8" name="S13-text107"/>
           <p:cNvSpPr txBox="1"/>
           <p:nvPr/>
         </p:nvSpPr>
@@ -5452,7 +5452,7 @@
       </p:sp>
       <p:sp>
         <p:nvSpPr>
-          <p:cNvPr id="9" name="S13-text105"/>
+          <p:cNvPr id="9" name="S13-text108"/>
           <p:cNvSpPr txBox="1"/>
           <p:nvPr/>
         </p:nvSpPr>
@@ -5508,7 +5508,7 @@
       </p:sp>
       <p:sp>
         <p:nvSpPr>
-          <p:cNvPr id="10" name="S13-text106"/>
+          <p:cNvPr id="10" name="S13-text109"/>
           <p:cNvSpPr txBox="1"/>
           <p:nvPr/>
         </p:nvSpPr>
@@ -5564,7 +5564,7 @@
       </p:sp>
       <p:sp>
         <p:nvSpPr>
-          <p:cNvPr id="11" name="S13-text107"/>
+          <p:cNvPr id="11" name="S13-text110"/>
           <p:cNvSpPr txBox="1"/>
           <p:nvPr/>
         </p:nvSpPr>
@@ -5717,7 +5717,7 @@
       </p:sp>
       <p:sp>
         <p:nvSpPr>
-          <p:cNvPr id="3" name="S14-card108"/>
+          <p:cNvPr id="3" name="S14-card111"/>
           <p:cNvSpPr/>
           <p:nvPr/>
         </p:nvSpPr>
@@ -5744,7 +5744,7 @@
       </p:sp>
       <p:sp>
         <p:nvSpPr>
-          <p:cNvPr id="4" name="S14-cardtext109"/>
+          <p:cNvPr id="4" name="S14-cardtext112"/>
           <p:cNvSpPr txBox="1"/>
           <p:nvPr/>
         </p:nvSpPr>
@@ -5786,7 +5786,7 @@
       </p:sp>
       <p:sp>
         <p:nvSpPr>
-          <p:cNvPr id="5" name="S14-word110"/>
+          <p:cNvPr id="5" name="S14-word113"/>
           <p:cNvSpPr txBox="1"/>
           <p:nvPr/>
         </p:nvSpPr>
@@ -5850,7 +5850,7 @@
       </p:sp>
       <p:sp>
         <p:nvSpPr>
-          <p:cNvPr id="6" name="S14-word111"/>
+          <p:cNvPr id="6" name="S14-word114"/>
           <p:cNvSpPr txBox="1"/>
           <p:nvPr/>
         </p:nvSpPr>
@@ -5914,7 +5914,7 @@
       </p:sp>
       <p:sp>
         <p:nvSpPr>
-          <p:cNvPr id="7" name="S14-word112"/>
+          <p:cNvPr id="7" name="S14-word115"/>
           <p:cNvSpPr txBox="1"/>
           <p:nvPr/>
         </p:nvSpPr>
@@ -5978,7 +5978,7 @@
       </p:sp>
       <p:sp>
         <p:nvSpPr>
-          <p:cNvPr id="8" name="S14-word113"/>
+          <p:cNvPr id="8" name="S14-word116"/>
           <p:cNvSpPr txBox="1"/>
           <p:nvPr/>
         </p:nvSpPr>
@@ -6465,7 +6465,7 @@
               <a:buNone/>
             </a:pPr>
             <a:r>
-              <a:rPr lang="en-US" altLang="ko-KR" sz="4000" b="1" dirty="0">
+              <a:rPr lang="ko-KR" altLang="en-US" sz="4000" b="1" dirty="0">
                 <a:solidFill>
                   <a:srgbClr val="1F2937"/>
                 </a:solidFill>
@@ -6473,7 +6473,7 @@
                 <a:ea typeface="맑은 고딕" pitchFamily="34" charset="-122"/>
                 <a:cs typeface="맑은 고딕" pitchFamily="34" charset="-120"/>
               </a:rPr>
-              <a:t>I think ~.</a:t>
+              <a:t>I think로 의견 말하기</a:t>
             </a:r>
             <a:endParaRPr lang="ko-KR" sz="4000" dirty="0"/>
           </a:p>
@@ -7651,20 +7651,20 @@
         </p:nvSpPr>
         <p:spPr>
           <a:xfrm>
-            <a:off x="548640" y="5021072"/>
-            <a:ext cx="11091672" cy="1196848"/>
+            <a:off x="6277356" y="2011680"/>
+            <a:ext cx="5362956" cy="4206240"/>
           </a:xfrm>
           <a:prstGeom prst="roundRect">
             <a:avLst>
-              <a:gd name="adj" fmla="val 9168"/>
+              <a:gd name="adj" fmla="val 2609"/>
             </a:avLst>
           </a:prstGeom>
           <a:solidFill>
-            <a:srgbClr val="E6ECF4"/>
+            <a:srgbClr val="EAF3F1"/>
           </a:solidFill>
           <a:ln w="12700">
             <a:solidFill>
-              <a:srgbClr val="E6ECF4"/>
+              <a:srgbClr val="EAF3F1"/>
             </a:solidFill>
             <a:prstDash val="solid"/>
           </a:ln>
@@ -7678,8 +7678,8 @@
         </p:nvSpPr>
         <p:spPr>
           <a:xfrm>
-            <a:off x="822960" y="5158232"/>
-            <a:ext cx="10543032" cy="922528"/>
+            <a:off x="6551676" y="2148840"/>
+            <a:ext cx="4814316" cy="3931920"/>
           </a:xfrm>
           <a:prstGeom prst="rect">
             <a:avLst/>
@@ -7688,7 +7688,7 @@
           <a:ln/>
         </p:spPr>
         <p:txBody>
-          <a:bodyPr wrap="square" lIns="0" tIns="0" rIns="0" bIns="0" rtlCol="0" anchor="ctr"/>
+          <a:bodyPr wrap="square" lIns="0" tIns="0" rIns="0" bIns="0" rtlCol="0" anchor="t"/>
           <a:lstStyle/>
           <a:p>
             <a:pPr eaLnBrk="0" indent="0" marL="0">
@@ -7698,7 +7698,7 @@
               <a:buNone/>
             </a:pPr>
             <a:r>
-              <a:rPr lang="ko-KR" altLang="en-US" sz="2800" dirty="0">
+              <a:rPr lang="ko-KR" altLang="en-US" sz="2800" b="1" dirty="0">
                 <a:solidFill>
                   <a:srgbClr val="1F2937"/>
                 </a:solidFill>
@@ -7706,7 +7706,7 @@
                 <a:ea typeface="맑은 고딕" pitchFamily="34" charset="-122"/>
                 <a:cs typeface="맑은 고딕" pitchFamily="34" charset="-120"/>
               </a:rPr>
-              <a:t>보기:　they are soft.　·　I can play soccer.　·　I can learn new things.</a:t>
+              <a:t>보기</a:t>
             </a:r>
             <a:endParaRPr lang="ko-KR" sz="2800" dirty="0"/>
           </a:p>
@@ -7714,13 +7714,154 @@
       </p:sp>
       <p:sp>
         <p:nvSpPr>
-          <p:cNvPr id="6" name="S06-chip31"/>
+          <p:cNvPr id="6" name="S06-word31"/>
           <p:cNvSpPr txBox="1"/>
           <p:nvPr/>
         </p:nvSpPr>
         <p:spPr>
           <a:xfrm>
-            <a:off x="548640" y="2130721"/>
+            <a:off x="6551676" y="2697480"/>
+            <a:ext cx="4814316" cy="929640"/>
+          </a:xfrm>
+          <a:prstGeom prst="roundRect">
+            <a:avLst>
+              <a:gd name="adj" fmla="val 13770"/>
+            </a:avLst>
+          </a:prstGeom>
+          <a:solidFill>
+            <a:srgbClr val="EAF3F1"/>
+          </a:solidFill>
+          <a:ln>
+            <a:solidFill>
+              <a:srgbClr val="EAF3F1"/>
+            </a:solidFill>
+          </a:ln>
+        </p:spPr>
+        <p:txBody>
+          <a:bodyPr wrap="square" lIns="76200" tIns="50800" rIns="76200" bIns="50800" rtlCol="0" anchor="ctr"/>
+          <a:lstStyle/>
+          <a:p>
+            <a:pPr eaLnBrk="0" algn="ctr" indent="0" marL="0">
+              <a:buNone/>
+            </a:pPr>
+            <a:r>
+              <a:rPr lang="en-US" altLang="ko-KR" sz="3200" b="1" dirty="0">
+                <a:solidFill>
+                  <a:srgbClr val="1F2937"/>
+                </a:solidFill>
+                <a:latin typeface="맑은 고딕" pitchFamily="34" charset="0"/>
+                <a:ea typeface="맑은 고딕" pitchFamily="34" charset="-122"/>
+                <a:cs typeface="맑은 고딕" pitchFamily="34" charset="-120"/>
+              </a:rPr>
+              <a:t>they are soft.</a:t>
+            </a:r>
+            <a:endParaRPr lang="ko-KR" sz="3200" dirty="0"/>
+          </a:p>
+        </p:txBody>
+      </p:sp>
+      <p:sp>
+        <p:nvSpPr>
+          <p:cNvPr id="7" name="S06-word32"/>
+          <p:cNvSpPr txBox="1"/>
+          <p:nvPr/>
+        </p:nvSpPr>
+        <p:spPr>
+          <a:xfrm>
+            <a:off x="6551676" y="3901440"/>
+            <a:ext cx="4814316" cy="929640"/>
+          </a:xfrm>
+          <a:prstGeom prst="roundRect">
+            <a:avLst>
+              <a:gd name="adj" fmla="val 13770"/>
+            </a:avLst>
+          </a:prstGeom>
+          <a:solidFill>
+            <a:srgbClr val="EAF3F1"/>
+          </a:solidFill>
+          <a:ln>
+            <a:solidFill>
+              <a:srgbClr val="EAF3F1"/>
+            </a:solidFill>
+          </a:ln>
+        </p:spPr>
+        <p:txBody>
+          <a:bodyPr wrap="square" lIns="76200" tIns="50800" rIns="76200" bIns="50800" rtlCol="0" anchor="ctr"/>
+          <a:lstStyle/>
+          <a:p>
+            <a:pPr eaLnBrk="0" algn="ctr" indent="0" marL="0">
+              <a:buNone/>
+            </a:pPr>
+            <a:r>
+              <a:rPr lang="en-US" altLang="ko-KR" sz="3200" b="1" dirty="0">
+                <a:solidFill>
+                  <a:srgbClr val="1F2937"/>
+                </a:solidFill>
+                <a:latin typeface="맑은 고딕" pitchFamily="34" charset="0"/>
+                <a:ea typeface="맑은 고딕" pitchFamily="34" charset="-122"/>
+                <a:cs typeface="맑은 고딕" pitchFamily="34" charset="-120"/>
+              </a:rPr>
+              <a:t>I can play soccer.</a:t>
+            </a:r>
+            <a:endParaRPr lang="ko-KR" sz="3200" dirty="0"/>
+          </a:p>
+        </p:txBody>
+      </p:sp>
+      <p:sp>
+        <p:nvSpPr>
+          <p:cNvPr id="8" name="S06-word33"/>
+          <p:cNvSpPr txBox="1"/>
+          <p:nvPr/>
+        </p:nvSpPr>
+        <p:spPr>
+          <a:xfrm>
+            <a:off x="6551676" y="5105400"/>
+            <a:ext cx="4814316" cy="929640"/>
+          </a:xfrm>
+          <a:prstGeom prst="roundRect">
+            <a:avLst>
+              <a:gd name="adj" fmla="val 13770"/>
+            </a:avLst>
+          </a:prstGeom>
+          <a:solidFill>
+            <a:srgbClr val="EAF3F1"/>
+          </a:solidFill>
+          <a:ln>
+            <a:solidFill>
+              <a:srgbClr val="EAF3F1"/>
+            </a:solidFill>
+          </a:ln>
+        </p:spPr>
+        <p:txBody>
+          <a:bodyPr wrap="square" lIns="76200" tIns="50800" rIns="76200" bIns="50800" rtlCol="0" anchor="ctr"/>
+          <a:lstStyle/>
+          <a:p>
+            <a:pPr eaLnBrk="0" algn="ctr" indent="0" marL="0">
+              <a:buNone/>
+            </a:pPr>
+            <a:r>
+              <a:rPr lang="en-US" altLang="ko-KR" sz="2800" b="1" dirty="0">
+                <a:solidFill>
+                  <a:srgbClr val="1F2937"/>
+                </a:solidFill>
+                <a:latin typeface="맑은 고딕" pitchFamily="34" charset="0"/>
+                <a:ea typeface="맑은 고딕" pitchFamily="34" charset="-122"/>
+                <a:cs typeface="맑은 고딕" pitchFamily="34" charset="-120"/>
+              </a:rPr>
+              <a:t>I can learn new things.</a:t>
+            </a:r>
+            <a:endParaRPr lang="ko-KR" sz="2800" dirty="0"/>
+          </a:p>
+        </p:txBody>
+      </p:sp>
+      <p:sp>
+        <p:nvSpPr>
+          <p:cNvPr id="9" name="S06-chip34"/>
+          <p:cNvSpPr txBox="1"/>
+          <p:nvPr/>
+        </p:nvSpPr>
+        <p:spPr>
+          <a:xfrm>
+            <a:off x="548640" y="2368296"/>
             <a:ext cx="566928" cy="566928"/>
           </a:xfrm>
           <a:prstGeom prst="roundRect">
@@ -7761,14 +7902,14 @@
       </p:sp>
       <p:sp>
         <p:nvSpPr>
-          <p:cNvPr id="7" name="S06-text32"/>
+          <p:cNvPr id="10" name="S06-text35"/>
           <p:cNvSpPr txBox="1"/>
           <p:nvPr/>
         </p:nvSpPr>
         <p:spPr>
           <a:xfrm>
             <a:off x="1344168" y="2011680"/>
-            <a:ext cx="10296144" cy="805011"/>
+            <a:ext cx="4567428" cy="1280160"/>
           </a:xfrm>
           <a:prstGeom prst="rect">
             <a:avLst/>
@@ -7800,13 +7941,13 @@
       </p:sp>
       <p:sp>
         <p:nvSpPr>
-          <p:cNvPr id="8" name="S06-chip33"/>
+          <p:cNvPr id="11" name="S06-chip36"/>
           <p:cNvSpPr txBox="1"/>
           <p:nvPr/>
         </p:nvSpPr>
         <p:spPr>
           <a:xfrm>
-            <a:off x="548640" y="3118612"/>
+            <a:off x="548640" y="3831336"/>
             <a:ext cx="566928" cy="566928"/>
           </a:xfrm>
           <a:prstGeom prst="roundRect">
@@ -7847,14 +7988,14 @@
       </p:sp>
       <p:sp>
         <p:nvSpPr>
-          <p:cNvPr id="9" name="S06-text34"/>
+          <p:cNvPr id="12" name="S06-text37"/>
           <p:cNvSpPr txBox="1"/>
           <p:nvPr/>
         </p:nvSpPr>
         <p:spPr>
           <a:xfrm>
-            <a:off x="1344168" y="2999571"/>
-            <a:ext cx="10296144" cy="805011"/>
+            <a:off x="1344168" y="3474720"/>
+            <a:ext cx="4567428" cy="1280160"/>
           </a:xfrm>
           <a:prstGeom prst="rect">
             <a:avLst/>
@@ -7886,13 +8027,13 @@
       </p:sp>
       <p:sp>
         <p:nvSpPr>
-          <p:cNvPr id="10" name="S06-chip35"/>
+          <p:cNvPr id="13" name="S06-chip38"/>
           <p:cNvSpPr txBox="1"/>
           <p:nvPr/>
         </p:nvSpPr>
         <p:spPr>
           <a:xfrm>
-            <a:off x="548640" y="4106503"/>
+            <a:off x="548640" y="5294376"/>
             <a:ext cx="566928" cy="566928"/>
           </a:xfrm>
           <a:prstGeom prst="roundRect">
@@ -7933,14 +8074,14 @@
       </p:sp>
       <p:sp>
         <p:nvSpPr>
-          <p:cNvPr id="11" name="S06-text36"/>
+          <p:cNvPr id="14" name="S06-text39"/>
           <p:cNvSpPr txBox="1"/>
           <p:nvPr/>
         </p:nvSpPr>
         <p:spPr>
           <a:xfrm>
-            <a:off x="1344168" y="3987461"/>
-            <a:ext cx="10296144" cy="805011"/>
+            <a:off x="1344168" y="4937760"/>
+            <a:ext cx="4567428" cy="1280160"/>
           </a:xfrm>
           <a:prstGeom prst="rect">
             <a:avLst/>
@@ -8086,7 +8227,7 @@
       </p:sp>
       <p:sp>
         <p:nvSpPr>
-          <p:cNvPr id="3" name="S07-card37"/>
+          <p:cNvPr id="3" name="S07-card40"/>
           <p:cNvSpPr/>
           <p:nvPr/>
         </p:nvSpPr>
@@ -8113,7 +8254,7 @@
       </p:sp>
       <p:sp>
         <p:nvSpPr>
-          <p:cNvPr id="4" name="S07-cardtext38"/>
+          <p:cNvPr id="4" name="S07-cardtext41"/>
           <p:cNvSpPr txBox="1"/>
           <p:nvPr/>
         </p:nvSpPr>
@@ -8155,7 +8296,7 @@
       </p:sp>
       <p:sp>
         <p:nvSpPr>
-          <p:cNvPr id="5" name="S07-card39"/>
+          <p:cNvPr id="5" name="S07-card42"/>
           <p:cNvSpPr/>
           <p:nvPr/>
         </p:nvSpPr>
@@ -8182,7 +8323,7 @@
       </p:sp>
       <p:sp>
         <p:nvSpPr>
-          <p:cNvPr id="6" name="S07-cardtext40"/>
+          <p:cNvPr id="6" name="S07-cardtext43"/>
           <p:cNvSpPr txBox="1"/>
           <p:nvPr/>
         </p:nvSpPr>
@@ -8224,7 +8365,7 @@
       </p:sp>
       <p:sp>
         <p:nvSpPr>
-          <p:cNvPr id="7" name="S07-chip41"/>
+          <p:cNvPr id="7" name="S07-chip44"/>
           <p:cNvSpPr txBox="1"/>
           <p:nvPr/>
         </p:nvSpPr>
@@ -8271,7 +8412,7 @@
       </p:sp>
       <p:sp>
         <p:nvSpPr>
-          <p:cNvPr id="8" name="S07-word42"/>
+          <p:cNvPr id="8" name="S07-word45"/>
           <p:cNvSpPr txBox="1"/>
           <p:nvPr/>
         </p:nvSpPr>
@@ -8318,7 +8459,7 @@
       </p:sp>
       <p:sp>
         <p:nvSpPr>
-          <p:cNvPr id="9" name="S07-chip43"/>
+          <p:cNvPr id="9" name="S07-chip46"/>
           <p:cNvSpPr txBox="1"/>
           <p:nvPr/>
         </p:nvSpPr>
@@ -8365,7 +8506,7 @@
       </p:sp>
       <p:sp>
         <p:nvSpPr>
-          <p:cNvPr id="10" name="S07-word44"/>
+          <p:cNvPr id="10" name="S07-word47"/>
           <p:cNvSpPr txBox="1"/>
           <p:nvPr/>
         </p:nvSpPr>
@@ -8526,7 +8667,7 @@
       </p:sp>
       <p:sp>
         <p:nvSpPr>
-          <p:cNvPr id="3" name="S08-text45"/>
+          <p:cNvPr id="3" name="S08-text48"/>
           <p:cNvSpPr txBox="1"/>
           <p:nvPr/>
         </p:nvSpPr>
@@ -8565,7 +8706,7 @@
       </p:sp>
       <p:sp>
         <p:nvSpPr>
-          <p:cNvPr id="4" name="S08-card46"/>
+          <p:cNvPr id="4" name="S08-card49"/>
           <p:cNvSpPr/>
           <p:nvPr/>
         </p:nvSpPr>
@@ -8592,7 +8733,7 @@
       </p:sp>
       <p:sp>
         <p:nvSpPr>
-          <p:cNvPr id="5" name="S08-cardtext47"/>
+          <p:cNvPr id="5" name="S08-cardtext50"/>
           <p:cNvSpPr txBox="1"/>
           <p:nvPr/>
         </p:nvSpPr>
@@ -8654,7 +8795,7 @@
       </p:sp>
       <p:sp>
         <p:nvSpPr>
-          <p:cNvPr id="6" name="S08-chip48"/>
+          <p:cNvPr id="6" name="S08-chip51"/>
           <p:cNvSpPr txBox="1"/>
           <p:nvPr/>
         </p:nvSpPr>
@@ -8701,7 +8842,7 @@
       </p:sp>
       <p:sp>
         <p:nvSpPr>
-          <p:cNvPr id="7" name="S08-text49"/>
+          <p:cNvPr id="7" name="S08-text52"/>
           <p:cNvSpPr txBox="1"/>
           <p:nvPr/>
         </p:nvSpPr>
@@ -8740,7 +8881,7 @@
       </p:sp>
       <p:sp>
         <p:nvSpPr>
-          <p:cNvPr id="8" name="S08-chip50"/>
+          <p:cNvPr id="8" name="S08-chip53"/>
           <p:cNvSpPr txBox="1"/>
           <p:nvPr/>
         </p:nvSpPr>
@@ -8787,7 +8928,7 @@
       </p:sp>
       <p:sp>
         <p:nvSpPr>
-          <p:cNvPr id="9" name="S08-text51"/>
+          <p:cNvPr id="9" name="S08-text54"/>
           <p:cNvSpPr txBox="1"/>
           <p:nvPr/>
         </p:nvSpPr>
@@ -8826,7 +8967,7 @@
       </p:sp>
       <p:sp>
         <p:nvSpPr>
-          <p:cNvPr id="10" name="S08-chip52"/>
+          <p:cNvPr id="10" name="S08-chip55"/>
           <p:cNvSpPr txBox="1"/>
           <p:nvPr/>
         </p:nvSpPr>
@@ -8873,7 +9014,7 @@
       </p:sp>
       <p:sp>
         <p:nvSpPr>
-          <p:cNvPr id="11" name="S08-text53"/>
+          <p:cNvPr id="11" name="S08-text56"/>
           <p:cNvSpPr txBox="1"/>
           <p:nvPr/>
         </p:nvSpPr>
@@ -9026,7 +9167,7 @@
       </p:sp>
       <p:sp>
         <p:nvSpPr>
-          <p:cNvPr id="3" name="S09-card54"/>
+          <p:cNvPr id="3" name="S09-card57"/>
           <p:cNvSpPr/>
           <p:nvPr/>
         </p:nvSpPr>
@@ -9053,7 +9194,7 @@
       </p:sp>
       <p:sp>
         <p:nvSpPr>
-          <p:cNvPr id="4" name="S09-cardtext55"/>
+          <p:cNvPr id="4" name="S09-cardtext58"/>
           <p:cNvSpPr txBox="1"/>
           <p:nvPr/>
         </p:nvSpPr>
@@ -9175,7 +9316,7 @@
       </p:sp>
       <p:sp>
         <p:nvSpPr>
-          <p:cNvPr id="5" name="S09-stepno56"/>
+          <p:cNvPr id="5" name="S09-stepno59"/>
           <p:cNvSpPr txBox="1"/>
           <p:nvPr/>
         </p:nvSpPr>
@@ -9220,7 +9361,7 @@
       </p:sp>
       <p:sp>
         <p:nvSpPr>
-          <p:cNvPr id="6" name="S09-text57"/>
+          <p:cNvPr id="6" name="S09-text60"/>
           <p:cNvSpPr txBox="1"/>
           <p:nvPr/>
         </p:nvSpPr>
@@ -9259,7 +9400,7 @@
       </p:sp>
       <p:sp>
         <p:nvSpPr>
-          <p:cNvPr id="7" name="S09-stepno58"/>
+          <p:cNvPr id="7" name="S09-stepno61"/>
           <p:cNvSpPr txBox="1"/>
           <p:nvPr/>
         </p:nvSpPr>
@@ -9304,7 +9445,7 @@
       </p:sp>
       <p:sp>
         <p:nvSpPr>
-          <p:cNvPr id="8" name="S09-text59"/>
+          <p:cNvPr id="8" name="S09-text62"/>
           <p:cNvSpPr txBox="1"/>
           <p:nvPr/>
         </p:nvSpPr>
@@ -9343,7 +9484,7 @@
       </p:sp>
       <p:sp>
         <p:nvSpPr>
-          <p:cNvPr id="9" name="S09-stepno60"/>
+          <p:cNvPr id="9" name="S09-stepno63"/>
           <p:cNvSpPr txBox="1"/>
           <p:nvPr/>
         </p:nvSpPr>
@@ -9388,7 +9529,7 @@
       </p:sp>
       <p:sp>
         <p:nvSpPr>
-          <p:cNvPr id="10" name="S09-text61"/>
+          <p:cNvPr id="10" name="S09-text64"/>
           <p:cNvSpPr txBox="1"/>
           <p:nvPr/>
         </p:nvSpPr>
@@ -9427,7 +9568,7 @@
       </p:sp>
       <p:sp>
         <p:nvSpPr>
-          <p:cNvPr id="11" name="S09-stepno62"/>
+          <p:cNvPr id="11" name="S09-stepno65"/>
           <p:cNvSpPr txBox="1"/>
           <p:nvPr/>
         </p:nvSpPr>
@@ -9472,7 +9613,7 @@
       </p:sp>
       <p:sp>
         <p:nvSpPr>
-          <p:cNvPr id="12" name="S09-text63"/>
+          <p:cNvPr id="12" name="S09-text66"/>
           <p:cNvSpPr txBox="1"/>
           <p:nvPr/>
         </p:nvSpPr>

--- a/dist/초6/영어/말하기와쓰기/초6_영어_말하기와쓰기_03_의견말하기.pptx
+++ b/dist/초6/영어/말하기와쓰기/초6_영어_말하기와쓰기_03_의견말하기.pptx
@@ -120,20 +120,20 @@
   <p:extLst>
     <p:ext uri="{521415D9-36F7-43E2-AB2F-B90AF26B5E84}">
       <p14:sectionLst xmlns:p14="http://schemas.microsoft.com/office/powerpoint/2010/main">
-        <p14:section name="도입" id="{aed25f8e-3f01-e3d1-f04f-6e7181bf7073}">
+        <p14:section name="도입" id="{80ad8f96-9fe5-2033-aefd-a43935a49c96}">
           <p14:sldIdLst>
             <p14:sldId id="256"/>
             <p14:sldId id="257"/>
           </p14:sldIdLst>
         </p14:section>
-        <p14:section name="개념" id="{ef219ce0-b314-dcf6-3b7c-e1c75082d8ce}">
+        <p14:section name="개념" id="{233701a4-5eb6-ff84-6043-1a82b079cb2b}">
           <p14:sldIdLst>
             <p14:sldId id="258"/>
             <p14:sldId id="259"/>
             <p14:sldId id="260"/>
           </p14:sldIdLst>
         </p14:section>
-        <p14:section name="연습" id="{ef13b8b4-9deb-c923-281c-43cc1345418c}">
+        <p14:section name="연습" id="{1b512990-dd92-54e0-62ac-82abb4a80e33}">
           <p14:sldIdLst>
             <p14:sldId id="261"/>
             <p14:sldId id="262"/>
@@ -141,19 +141,19 @@
             <p14:sldId id="264"/>
           </p14:sldIdLst>
         </p14:section>
-        <p14:section name="확인" id="{71a8a375-2c56-1ea3-7e02-65f5dc00fe8e}">
+        <p14:section name="확인" id="{c3c4e75f-b6a7-e16f-ce07-410767acec46}">
           <p14:sldIdLst>
             <p14:sldId id="265"/>
             <p14:sldId id="266"/>
             <p14:sldId id="267"/>
           </p14:sldIdLst>
         </p14:section>
-        <p14:section name="정리" id="{34453829-96c8-c925-3b1c-eff38025fe61}">
+        <p14:section name="정리" id="{6ab0c7f0-23cc-8305-62b7-f3fb017b3e21}">
           <p14:sldIdLst>
             <p14:sldId id="268"/>
           </p14:sldIdLst>
         </p14:section>
-        <p14:section name="보충" id="{2156c502-a12b-e046-de83-37935fa0aa90}">
+        <p14:section name="보충" id="{f0747151-2f5b-e7e4-1c6e-2f1f8174eae4}">
           <p14:sldIdLst>
             <p14:sldId id="269"/>
           </p14:sldIdLst>
@@ -7933,7 +7933,7 @@
                 <a:ea typeface="맑은 고딕" pitchFamily="34" charset="-122"/>
                 <a:cs typeface="맑은 고딕" pitchFamily="34" charset="-120"/>
               </a:rPr>
-              <a:t>I think cats are cute because ______.</a:t>
+              <a:t>I think cats are cute because ______.</a:t>
             </a:r>
             <a:endParaRPr lang="ko-KR" sz="2800" dirty="0"/>
           </a:p>
@@ -8019,7 +8019,7 @@
                 <a:ea typeface="맑은 고딕" pitchFamily="34" charset="-122"/>
                 <a:cs typeface="맑은 고딕" pitchFamily="34" charset="-120"/>
               </a:rPr>
-              <a:t>I think P.E. is fun because ______.</a:t>
+              <a:t>I think P.E. is fun because ______.</a:t>
             </a:r>
             <a:endParaRPr lang="ko-KR" sz="2800" dirty="0"/>
           </a:p>
@@ -8105,7 +8105,7 @@
                 <a:ea typeface="맑은 고딕" pitchFamily="34" charset="-122"/>
                 <a:cs typeface="맑은 고딕" pitchFamily="34" charset="-120"/>
               </a:rPr>
-              <a:t>I think books are great because ______.</a:t>
+              <a:t>I think books are great because ______.</a:t>
             </a:r>
             <a:endParaRPr lang="ko-KR" sz="2800" dirty="0"/>
           </a:p>

--- a/dist/초6/영어/말하기와쓰기/초6_영어_말하기와쓰기_03_의견말하기.pptx
+++ b/dist/초6/영어/말하기와쓰기/초6_영어_말하기와쓰기_03_의견말하기.pptx
@@ -120,20 +120,20 @@
   <p:extLst>
     <p:ext uri="{521415D9-36F7-43E2-AB2F-B90AF26B5E84}">
       <p14:sectionLst xmlns:p14="http://schemas.microsoft.com/office/powerpoint/2010/main">
-        <p14:section name="도입" id="{80ad8f96-9fe5-2033-aefd-a43935a49c96}">
+        <p14:section name="도입" id="{1926f380-17c2-7e52-2525-01edcd46f3bc}">
           <p14:sldIdLst>
             <p14:sldId id="256"/>
             <p14:sldId id="257"/>
           </p14:sldIdLst>
         </p14:section>
-        <p14:section name="개념" id="{233701a4-5eb6-ff84-6043-1a82b079cb2b}">
+        <p14:section name="개념" id="{1bdfd4a4-fbf6-f1f5-cc9c-3fab94138b03}">
           <p14:sldIdLst>
             <p14:sldId id="258"/>
             <p14:sldId id="259"/>
             <p14:sldId id="260"/>
           </p14:sldIdLst>
         </p14:section>
-        <p14:section name="연습" id="{1b512990-dd92-54e0-62ac-82abb4a80e33}">
+        <p14:section name="연습" id="{a57b060b-8517-ff54-0fd5-32b1284a0eef}">
           <p14:sldIdLst>
             <p14:sldId id="261"/>
             <p14:sldId id="262"/>
@@ -141,19 +141,19 @@
             <p14:sldId id="264"/>
           </p14:sldIdLst>
         </p14:section>
-        <p14:section name="확인" id="{c3c4e75f-b6a7-e16f-ce07-410767acec46}">
+        <p14:section name="확인" id="{0d1371c7-3ab5-9d67-844a-603785497be2}">
           <p14:sldIdLst>
             <p14:sldId id="265"/>
             <p14:sldId id="266"/>
             <p14:sldId id="267"/>
           </p14:sldIdLst>
         </p14:section>
-        <p14:section name="정리" id="{6ab0c7f0-23cc-8305-62b7-f3fb017b3e21}">
+        <p14:section name="정리" id="{b29c6b0d-92d9-4b39-4ca5-e9f7a5fe418f}">
           <p14:sldIdLst>
             <p14:sldId id="268"/>
           </p14:sldIdLst>
         </p14:section>
-        <p14:section name="보충" id="{f0747151-2f5b-e7e4-1c6e-2f1f8174eae4}">
+        <p14:section name="보충" id="{97652126-b307-36b5-5893-4984a28efe77}">
           <p14:sldIdLst>
             <p14:sldId id="269"/>
           </p14:sldIdLst>

--- a/dist/초6/영어/말하기와쓰기/초6_영어_말하기와쓰기_03_의견말하기.pptx
+++ b/dist/초6/영어/말하기와쓰기/초6_영어_말하기와쓰기_03_의견말하기.pptx
@@ -120,20 +120,20 @@
   <p:extLst>
     <p:ext uri="{521415D9-36F7-43E2-AB2F-B90AF26B5E84}">
       <p14:sectionLst xmlns:p14="http://schemas.microsoft.com/office/powerpoint/2010/main">
-        <p14:section name="도입" id="{1926f380-17c2-7e52-2525-01edcd46f3bc}">
+        <p14:section name="도입" id="{1d0c7d3f-57c6-a2db-060f-90a5b27c84eb}">
           <p14:sldIdLst>
             <p14:sldId id="256"/>
             <p14:sldId id="257"/>
           </p14:sldIdLst>
         </p14:section>
-        <p14:section name="개념" id="{1bdfd4a4-fbf6-f1f5-cc9c-3fab94138b03}">
+        <p14:section name="개념" id="{0952f1c5-e4f2-0896-c886-07cf06cdec3e}">
           <p14:sldIdLst>
             <p14:sldId id="258"/>
             <p14:sldId id="259"/>
             <p14:sldId id="260"/>
           </p14:sldIdLst>
         </p14:section>
-        <p14:section name="연습" id="{a57b060b-8517-ff54-0fd5-32b1284a0eef}">
+        <p14:section name="연습" id="{dcb2b4bc-166f-83f2-0c01-66d46bf74caa}">
           <p14:sldIdLst>
             <p14:sldId id="261"/>
             <p14:sldId id="262"/>
@@ -141,19 +141,19 @@
             <p14:sldId id="264"/>
           </p14:sldIdLst>
         </p14:section>
-        <p14:section name="확인" id="{0d1371c7-3ab5-9d67-844a-603785497be2}">
+        <p14:section name="확인" id="{8b1046af-3b58-3f3c-2568-a46a769a239c}">
           <p14:sldIdLst>
             <p14:sldId id="265"/>
             <p14:sldId id="266"/>
             <p14:sldId id="267"/>
           </p14:sldIdLst>
         </p14:section>
-        <p14:section name="정리" id="{b29c6b0d-92d9-4b39-4ca5-e9f7a5fe418f}">
+        <p14:section name="정리" id="{28210dee-7b8c-984b-0664-c39640edf7ab}">
           <p14:sldIdLst>
             <p14:sldId id="268"/>
           </p14:sldIdLst>
         </p14:section>
-        <p14:section name="보충" id="{97652126-b307-36b5-5893-4984a28efe77}">
+        <p14:section name="보충" id="{6c030240-4064-f11b-71da-8fa14434603a}">
           <p14:sldIdLst>
             <p14:sldId id="269"/>
           </p14:sldIdLst>
